--- a/m6/diapositivos/sessao-02-m6-f02.pptx
+++ b/m6/diapositivos/sessao-02-m6-f02.pptx
@@ -4096,7 +4096,35 @@
                 <a:ea typeface="Arial" pitchFamily="34" charset="-122"/>
                 <a:cs typeface="Arial" pitchFamily="34" charset="-120"/>
               </a:rPr>
-              <a:t>Antero de Quental, Os Sonetos Completos (1886), grafia da edição.</a:t>
+              <a:t>Antero de Quental, </a:t>
+            </a:r>
+            <a:pPr indent="0" marL="0">
+              <a:buNone/>
+            </a:pPr>
+            <a:r>
+              <a:rPr lang="en-US" sz="1200" i="1" dirty="0">
+                <a:solidFill>
+                  <a:srgbClr val="A9A79F"/>
+                </a:solidFill>
+                <a:latin typeface="Arial" pitchFamily="34" charset="0"/>
+                <a:ea typeface="Arial" pitchFamily="34" charset="-122"/>
+                <a:cs typeface="Arial" pitchFamily="34" charset="-120"/>
+              </a:rPr>
+              <a:t>Os Sonetos Completos</a:t>
+            </a:r>
+            <a:pPr indent="0" marL="0">
+              <a:buNone/>
+            </a:pPr>
+            <a:r>
+              <a:rPr lang="en-US" sz="1200" dirty="0">
+                <a:solidFill>
+                  <a:srgbClr val="A9A79F"/>
+                </a:solidFill>
+                <a:latin typeface="Arial" pitchFamily="34" charset="0"/>
+                <a:ea typeface="Arial" pitchFamily="34" charset="-122"/>
+                <a:cs typeface="Arial" pitchFamily="34" charset="-120"/>
+              </a:rPr>
+              <a:t> (1886), grafia da edição.</a:t>
             </a:r>
             <a:endParaRPr lang="en-US" sz="1200" dirty="0"/>
           </a:p>
@@ -4536,7 +4564,35 @@
                 <a:ea typeface="Arial" pitchFamily="34" charset="-122"/>
                 <a:cs typeface="Arial" pitchFamily="34" charset="-120"/>
               </a:rPr>
-              <a:t>Antero de Quental, Os Sonetos Completos (1886), grafia da edição.</a:t>
+              <a:t>Antero de Quental, </a:t>
+            </a:r>
+            <a:pPr indent="0" marL="0">
+              <a:buNone/>
+            </a:pPr>
+            <a:r>
+              <a:rPr lang="en-US" sz="1200" i="1" dirty="0">
+                <a:solidFill>
+                  <a:srgbClr val="A9A79F"/>
+                </a:solidFill>
+                <a:latin typeface="Arial" pitchFamily="34" charset="0"/>
+                <a:ea typeface="Arial" pitchFamily="34" charset="-122"/>
+                <a:cs typeface="Arial" pitchFamily="34" charset="-120"/>
+              </a:rPr>
+              <a:t>Os Sonetos Completos</a:t>
+            </a:r>
+            <a:pPr indent="0" marL="0">
+              <a:buNone/>
+            </a:pPr>
+            <a:r>
+              <a:rPr lang="en-US" sz="1200" dirty="0">
+                <a:solidFill>
+                  <a:srgbClr val="A9A79F"/>
+                </a:solidFill>
+                <a:latin typeface="Arial" pitchFamily="34" charset="0"/>
+                <a:ea typeface="Arial" pitchFamily="34" charset="-122"/>
+                <a:cs typeface="Arial" pitchFamily="34" charset="-120"/>
+              </a:rPr>
+              <a:t> (1886), grafia da edição.</a:t>
             </a:r>
             <a:endParaRPr lang="en-US" sz="1200" dirty="0"/>
           </a:p>
@@ -5016,7 +5072,35 @@
                 <a:ea typeface="Arial" pitchFamily="34" charset="-122"/>
                 <a:cs typeface="Arial" pitchFamily="34" charset="-120"/>
               </a:rPr>
-              <a:t>Antero de Quental, Os Sonetos Completos (1886), grafia da edição (v. 14 corrigido: «mão»).</a:t>
+              <a:t>Antero de Quental, </a:t>
+            </a:r>
+            <a:pPr indent="0" marL="0">
+              <a:buNone/>
+            </a:pPr>
+            <a:r>
+              <a:rPr lang="en-US" sz="1200" i="1" dirty="0">
+                <a:solidFill>
+                  <a:srgbClr val="A9A79F"/>
+                </a:solidFill>
+                <a:latin typeface="Arial" pitchFamily="34" charset="0"/>
+                <a:ea typeface="Arial" pitchFamily="34" charset="-122"/>
+                <a:cs typeface="Arial" pitchFamily="34" charset="-120"/>
+              </a:rPr>
+              <a:t>Os Sonetos Completos</a:t>
+            </a:r>
+            <a:pPr indent="0" marL="0">
+              <a:buNone/>
+            </a:pPr>
+            <a:r>
+              <a:rPr lang="en-US" sz="1200" dirty="0">
+                <a:solidFill>
+                  <a:srgbClr val="A9A79F"/>
+                </a:solidFill>
+                <a:latin typeface="Arial" pitchFamily="34" charset="0"/>
+                <a:ea typeface="Arial" pitchFamily="34" charset="-122"/>
+                <a:cs typeface="Arial" pitchFamily="34" charset="-120"/>
+              </a:rPr>
+              <a:t> (1886), grafia da edição (v. 14 corrigido: «mão»).</a:t>
             </a:r>
             <a:endParaRPr lang="en-US" sz="1200" dirty="0"/>
           </a:p>
@@ -5456,7 +5540,35 @@
                 <a:ea typeface="Arial" pitchFamily="34" charset="-122"/>
                 <a:cs typeface="Arial" pitchFamily="34" charset="-120"/>
               </a:rPr>
-              <a:t>Antero de Quental, Os Sonetos Completos (1886), grafia da edição (v. 14 corrigido: «mão»).</a:t>
+              <a:t>Antero de Quental, </a:t>
+            </a:r>
+            <a:pPr indent="0" marL="0">
+              <a:buNone/>
+            </a:pPr>
+            <a:r>
+              <a:rPr lang="en-US" sz="1200" i="1" dirty="0">
+                <a:solidFill>
+                  <a:srgbClr val="A9A79F"/>
+                </a:solidFill>
+                <a:latin typeface="Arial" pitchFamily="34" charset="0"/>
+                <a:ea typeface="Arial" pitchFamily="34" charset="-122"/>
+                <a:cs typeface="Arial" pitchFamily="34" charset="-120"/>
+              </a:rPr>
+              <a:t>Os Sonetos Completos</a:t>
+            </a:r>
+            <a:pPr indent="0" marL="0">
+              <a:buNone/>
+            </a:pPr>
+            <a:r>
+              <a:rPr lang="en-US" sz="1200" dirty="0">
+                <a:solidFill>
+                  <a:srgbClr val="A9A79F"/>
+                </a:solidFill>
+                <a:latin typeface="Arial" pitchFamily="34" charset="0"/>
+                <a:ea typeface="Arial" pitchFamily="34" charset="-122"/>
+                <a:cs typeface="Arial" pitchFamily="34" charset="-120"/>
+              </a:rPr>
+              <a:t> (1886), grafia da edição (v. 14 corrigido: «mão»).</a:t>
             </a:r>
             <a:endParaRPr lang="en-US" sz="1200" dirty="0"/>
           </a:p>
@@ -5863,7 +5975,41 @@
                 <a:ea typeface="Arial" pitchFamily="34" charset="-122"/>
                 <a:cs typeface="Arial" pitchFamily="34" charset="-120"/>
               </a:rPr>
-              <a:t>Dois sonetos de Antero, «Ideal» e «Na mão de Deus», dos Sonetos Completos de 1886, lidos lado a lado depois de «O Palácio da Ventura».</a:t>
+              <a:t>Dois sonetos de Antero, «Ideal» e «Na mão de Deus», dos </a:t>
+            </a:r>
+            <a:pPr indent="0" marL="0">
+              <a:lnSpc>
+                <a:spcPct val="105000"/>
+              </a:lnSpc>
+              <a:buNone/>
+            </a:pPr>
+            <a:r>
+              <a:rPr lang="en-US" sz="2200" i="1" dirty="0">
+                <a:solidFill>
+                  <a:srgbClr val="F2F0EA"/>
+                </a:solidFill>
+                <a:latin typeface="Arial" pitchFamily="34" charset="0"/>
+                <a:ea typeface="Arial" pitchFamily="34" charset="-122"/>
+                <a:cs typeface="Arial" pitchFamily="34" charset="-120"/>
+              </a:rPr>
+              <a:t>Sonetos Completos</a:t>
+            </a:r>
+            <a:pPr indent="0" marL="0">
+              <a:lnSpc>
+                <a:spcPct val="105000"/>
+              </a:lnSpc>
+              <a:buNone/>
+            </a:pPr>
+            <a:r>
+              <a:rPr lang="en-US" sz="2200" dirty="0">
+                <a:solidFill>
+                  <a:srgbClr val="F2F0EA"/>
+                </a:solidFill>
+                <a:latin typeface="Arial" pitchFamily="34" charset="0"/>
+                <a:ea typeface="Arial" pitchFamily="34" charset="-122"/>
+                <a:cs typeface="Arial" pitchFamily="34" charset="-120"/>
+              </a:rPr>
+              <a:t> de 1886, lidos lado a lado depois de «O Palácio da Ventura».</a:t>
             </a:r>
             <a:endParaRPr lang="en-US" sz="2200" dirty="0"/>
           </a:p>
